--- a/storytelling/Datathon_FIAP.pptx
+++ b/storytelling/Datathon_FIAP.pptx
@@ -389,7 +389,7 @@
           <a:p>
             <a:fld id="{9AB3A824-1A51-4B26-AD58-A6D8E14F6C04}" type="datetimeFigureOut">
               <a:rPr lang="en-US" dirty="0"/>
-              <a:t>4/24/2026</a:t>
+              <a:t>4/25/2026</a:t>
             </a:fld>
             <a:endParaRPr lang="en-US" dirty="0"/>
           </a:p>
@@ -740,7 +740,7 @@
           <a:p>
             <a:fld id="{D857E33E-8B18-4087-B112-809917729534}" type="datetimeFigureOut">
               <a:rPr lang="en-US" dirty="0"/>
-              <a:t>4/24/2026</a:t>
+              <a:t>4/25/2026</a:t>
             </a:fld>
             <a:endParaRPr lang="en-US" dirty="0"/>
           </a:p>
@@ -1059,7 +1059,7 @@
           <a:p>
             <a:fld id="{D3FFE419-2371-464F-8239-3959401C3561}" type="datetimeFigureOut">
               <a:rPr lang="en-US" dirty="0"/>
-              <a:t>4/24/2026</a:t>
+              <a:t>4/25/2026</a:t>
             </a:fld>
             <a:endParaRPr lang="en-US" dirty="0"/>
           </a:p>
@@ -1323,7 +1323,7 @@
           <a:p>
             <a:fld id="{97D162C4-EDD9-4389-A98B-B87ECEA2A816}" type="datetimeFigureOut">
               <a:rPr lang="en-US" dirty="0"/>
-              <a:t>4/24/2026</a:t>
+              <a:t>4/25/2026</a:t>
             </a:fld>
             <a:endParaRPr lang="en-US" dirty="0"/>
           </a:p>
@@ -1748,7 +1748,7 @@
           <a:p>
             <a:fld id="{3E5059C3-6A89-4494-99FF-5A4D6FFD50EB}" type="datetimeFigureOut">
               <a:rPr lang="en-US" dirty="0"/>
-              <a:t>4/24/2026</a:t>
+              <a:t>4/25/2026</a:t>
             </a:fld>
             <a:endParaRPr lang="en-US" dirty="0"/>
           </a:p>
@@ -2078,7 +2078,7 @@
           <a:p>
             <a:fld id="{CA954B2F-12DE-47F5-8894-472B206D2E1E}" type="datetimeFigureOut">
               <a:rPr lang="en-US" dirty="0"/>
-              <a:t>4/24/2026</a:t>
+              <a:t>4/25/2026</a:t>
             </a:fld>
             <a:endParaRPr lang="en-US" dirty="0"/>
           </a:p>
@@ -2638,7 +2638,7 @@
           <a:p>
             <a:fld id="{3F30E46F-7819-4ACF-B48B-48222C2ACC88}" type="datetimeFigureOut">
               <a:rPr lang="en-US" dirty="0"/>
-              <a:t>4/24/2026</a:t>
+              <a:t>4/25/2026</a:t>
             </a:fld>
             <a:endParaRPr lang="en-US" dirty="0"/>
           </a:p>
@@ -2851,7 +2851,7 @@
           <a:p>
             <a:fld id="{1FAF3416-4057-4DAA-829D-4CA07428D088}" type="datetimeFigureOut">
               <a:rPr lang="en-US" dirty="0"/>
-              <a:t>4/24/2026</a:t>
+              <a:t>4/25/2026</a:t>
             </a:fld>
             <a:endParaRPr lang="en-US" dirty="0"/>
           </a:p>
@@ -3083,7 +3083,7 @@
           <a:p>
             <a:fld id="{921D9284-D300-4297-87F7-E791DCC15DB1}" type="datetimeFigureOut">
               <a:rPr lang="en-US" dirty="0"/>
-              <a:t>4/24/2026</a:t>
+              <a:t>4/25/2026</a:t>
             </a:fld>
             <a:endParaRPr lang="en-US" dirty="0"/>
           </a:p>
@@ -3469,7 +3469,7 @@
           <a:p>
             <a:fld id="{37D525BB-DA17-4BA0-B3C8-3AC3ABC827E6}" type="datetimeFigureOut">
               <a:rPr lang="en-US" dirty="0"/>
-              <a:t>4/24/2026</a:t>
+              <a:t>4/25/2026</a:t>
             </a:fld>
             <a:endParaRPr lang="en-US" dirty="0"/>
           </a:p>
@@ -3886,7 +3886,7 @@
           <a:p>
             <a:fld id="{B16C4C9A-3960-41CF-A4E9-2A8FB932454B}" type="datetimeFigureOut">
               <a:rPr lang="en-US" dirty="0"/>
-              <a:t>4/24/2026</a:t>
+              <a:t>4/25/2026</a:t>
             </a:fld>
             <a:endParaRPr lang="en-US" dirty="0"/>
           </a:p>
@@ -4235,7 +4235,7 @@
           <a:p>
             <a:fld id="{3CBC1C18-307B-4F68-A007-B5B542270E8D}" type="datetimeFigureOut">
               <a:rPr lang="en-US" dirty="0"/>
-              <a:t>4/24/2026</a:t>
+              <a:t>4/25/2026</a:t>
             </a:fld>
             <a:endParaRPr lang="en-US" dirty="0"/>
           </a:p>
@@ -7152,7 +7152,7 @@
                   <a:srgbClr val="282A2C"/>
                 </a:highlight>
               </a:rPr>
-              <a:t>  Alunos com maior engajamento tendem a apresentar melhor desempenho acadêmico; </a:t>
+              <a:t>  Alunos com maior engajamento apresentam melhor desempenho acadêmico; </a:t>
             </a:r>
             <a:br>
               <a:rPr lang="pt-BR" sz="1400" b="1" dirty="0">
@@ -17028,7 +17028,7 @@
         </p:nvSpPr>
         <p:spPr>
           <a:xfrm>
-            <a:off x="1622321" y="430177"/>
+            <a:off x="1892709" y="341687"/>
             <a:ext cx="6125497" cy="499133"/>
           </a:xfrm>
           <a:prstGeom prst="rect">
@@ -17093,8 +17093,8 @@
         </p:nvSpPr>
         <p:spPr>
           <a:xfrm>
-            <a:off x="1002890" y="1101213"/>
-            <a:ext cx="7905136" cy="5756787"/>
+            <a:off x="1002890" y="1307690"/>
+            <a:ext cx="7905136" cy="5550310"/>
           </a:xfrm>
           <a:solidFill>
             <a:schemeClr val="bg1"/>
@@ -17106,10 +17106,6 @@
           </a:bodyPr>
           <a:lstStyle/>
           <a:p>
-            <a:pPr algn="l"/>
-            <a:endParaRPr lang="pt-BR" sz="1600" b="1" dirty="0"/>
-          </a:p>
-          <a:p>
             <a:pPr algn="just">
               <a:lnSpc>
                 <a:spcPct val="150000"/>
@@ -17121,7 +17117,7 @@
                   <a:srgbClr val="00B0F0"/>
                 </a:solidFill>
               </a:rPr>
-              <a:t>•  </a:t>
+              <a:t>• </a:t>
             </a:r>
             <a:r>
               <a:rPr lang="pt-BR" sz="1200" b="1" dirty="0"/>
@@ -17140,7 +17136,7 @@
                   <a:srgbClr val="00B0F0"/>
                 </a:solidFill>
               </a:rPr>
-              <a:t>•  </a:t>
+              <a:t>• </a:t>
             </a:r>
             <a:r>
               <a:rPr lang="pt-BR" sz="1200" b="1" dirty="0"/>
@@ -17159,11 +17155,11 @@
                   <a:srgbClr val="00B0F0"/>
                 </a:solidFill>
               </a:rPr>
-              <a:t>•</a:t>
+              <a:t>• </a:t>
             </a:r>
             <a:r>
               <a:rPr lang="pt-BR" sz="1200" b="1" dirty="0"/>
-              <a:t>  O engajamento (IEG) atua como um dos principais motores do desempenho e da evolução dos alunos;  </a:t>
+              <a:t>O aumento do engajamento (IEG) está diretamente associado à melhora do desempenho acadêmico (IDA) e da evolução do aluno (IPV), indicando que alunos mais engajados tendem a apresentar melhores resultados.</a:t>
             </a:r>
           </a:p>
           <a:p>
@@ -17182,7 +17178,7 @@
             </a:r>
             <a:r>
               <a:rPr lang="pt-BR" sz="1200" b="1" dirty="0"/>
-              <a:t>  O ponto de virada (IPV) está diretamente relacionado ao desempenho global (INDE), indicando o papel da evolução do aluno nos resultados;</a:t>
+              <a:t> O ponto de virada (IPV) está diretamente relacionado ao desempenho global (INDE), indicando o papel da evolução do aluno nos resultados;</a:t>
             </a:r>
           </a:p>
           <a:p>
@@ -17201,7 +17197,7 @@
             </a:r>
             <a:r>
               <a:rPr lang="pt-BR" sz="1200" b="1" dirty="0"/>
-              <a:t>  O desempenho global é resultado da combinação de múltiplos fatores (IDA, IEG, IPV e IPP), e não de variáveis isoladas;</a:t>
+              <a:t> O desempenho global é resultado da combinação de múltiplos fatores (IDA, IEG, IPV e IPP), e não de variáveis isoladas;</a:t>
             </a:r>
           </a:p>
           <a:p>
@@ -17235,7 +17231,7 @@
                   <a:srgbClr val="00B0F0"/>
                 </a:solidFill>
               </a:rPr>
-              <a:t>•  </a:t>
+              <a:t>• </a:t>
             </a:r>
             <a:r>
               <a:rPr lang="pt-BR" sz="1200" b="1" dirty="0"/>
@@ -17277,7 +17273,7 @@
             </a:r>
             <a:r>
               <a:rPr lang="pt-BR" sz="1200" b="1" dirty="0"/>
-              <a:t>  O programa demonstra evolução consistente ao longo das fases, indicando impacto positivo no desenvolvimento dos alunos.</a:t>
+              <a:t> O programa demonstra evolução consistente ao longo das fases, indicando impacto positivo no desenvolvimento dos alunos.</a:t>
             </a:r>
           </a:p>
           <a:p>
@@ -17535,6 +17531,21 @@
             <a:r>
               <a:rPr lang="pt-BR" sz="1200" b="1" dirty="0"/>
               <a:t> Adotar uma abordagem integrada, combinando desempenho acadêmico (IDA), engajamento (IEG) e evolução (IPV) nas estratégias pedagógicas;</a:t>
+            </a:r>
+          </a:p>
+          <a:p>
+            <a:pPr algn="l"/>
+            <a:r>
+              <a:rPr lang="pt-BR" sz="1200" b="1" dirty="0">
+                <a:solidFill>
+                  <a:srgbClr val="00B0F0"/>
+                </a:solidFill>
+              </a:rPr>
+              <a:t>•  </a:t>
+            </a:r>
+            <a:r>
+              <a:rPr lang="pt-BR" sz="1200" b="1" dirty="0"/>
+              <a:t>Priorizar ações que aumentem o engajamento dos alunos (IEG), principal motor do desempenho e da evolução;</a:t>
             </a:r>
             <a:br>
               <a:rPr lang="pt-BR" sz="1200" b="1" dirty="0"/>

--- a/storytelling/Datathon_FIAP.pptx
+++ b/storytelling/Datathon_FIAP.pptx
@@ -389,7 +389,7 @@
           <a:p>
             <a:fld id="{9AB3A824-1A51-4B26-AD58-A6D8E14F6C04}" type="datetimeFigureOut">
               <a:rPr lang="en-US" dirty="0"/>
-              <a:t>4/25/2026</a:t>
+              <a:t>4/27/2026</a:t>
             </a:fld>
             <a:endParaRPr lang="en-US" dirty="0"/>
           </a:p>
@@ -740,7 +740,7 @@
           <a:p>
             <a:fld id="{D857E33E-8B18-4087-B112-809917729534}" type="datetimeFigureOut">
               <a:rPr lang="en-US" dirty="0"/>
-              <a:t>4/25/2026</a:t>
+              <a:t>4/27/2026</a:t>
             </a:fld>
             <a:endParaRPr lang="en-US" dirty="0"/>
           </a:p>
@@ -1059,7 +1059,7 @@
           <a:p>
             <a:fld id="{D3FFE419-2371-464F-8239-3959401C3561}" type="datetimeFigureOut">
               <a:rPr lang="en-US" dirty="0"/>
-              <a:t>4/25/2026</a:t>
+              <a:t>4/27/2026</a:t>
             </a:fld>
             <a:endParaRPr lang="en-US" dirty="0"/>
           </a:p>
@@ -1323,7 +1323,7 @@
           <a:p>
             <a:fld id="{97D162C4-EDD9-4389-A98B-B87ECEA2A816}" type="datetimeFigureOut">
               <a:rPr lang="en-US" dirty="0"/>
-              <a:t>4/25/2026</a:t>
+              <a:t>4/27/2026</a:t>
             </a:fld>
             <a:endParaRPr lang="en-US" dirty="0"/>
           </a:p>
@@ -1748,7 +1748,7 @@
           <a:p>
             <a:fld id="{3E5059C3-6A89-4494-99FF-5A4D6FFD50EB}" type="datetimeFigureOut">
               <a:rPr lang="en-US" dirty="0"/>
-              <a:t>4/25/2026</a:t>
+              <a:t>4/27/2026</a:t>
             </a:fld>
             <a:endParaRPr lang="en-US" dirty="0"/>
           </a:p>
@@ -2078,7 +2078,7 @@
           <a:p>
             <a:fld id="{CA954B2F-12DE-47F5-8894-472B206D2E1E}" type="datetimeFigureOut">
               <a:rPr lang="en-US" dirty="0"/>
-              <a:t>4/25/2026</a:t>
+              <a:t>4/27/2026</a:t>
             </a:fld>
             <a:endParaRPr lang="en-US" dirty="0"/>
           </a:p>
@@ -2638,7 +2638,7 @@
           <a:p>
             <a:fld id="{3F30E46F-7819-4ACF-B48B-48222C2ACC88}" type="datetimeFigureOut">
               <a:rPr lang="en-US" dirty="0"/>
-              <a:t>4/25/2026</a:t>
+              <a:t>4/27/2026</a:t>
             </a:fld>
             <a:endParaRPr lang="en-US" dirty="0"/>
           </a:p>
@@ -2851,7 +2851,7 @@
           <a:p>
             <a:fld id="{1FAF3416-4057-4DAA-829D-4CA07428D088}" type="datetimeFigureOut">
               <a:rPr lang="en-US" dirty="0"/>
-              <a:t>4/25/2026</a:t>
+              <a:t>4/27/2026</a:t>
             </a:fld>
             <a:endParaRPr lang="en-US" dirty="0"/>
           </a:p>
@@ -3083,7 +3083,7 @@
           <a:p>
             <a:fld id="{921D9284-D300-4297-87F7-E791DCC15DB1}" type="datetimeFigureOut">
               <a:rPr lang="en-US" dirty="0"/>
-              <a:t>4/25/2026</a:t>
+              <a:t>4/27/2026</a:t>
             </a:fld>
             <a:endParaRPr lang="en-US" dirty="0"/>
           </a:p>
@@ -3469,7 +3469,7 @@
           <a:p>
             <a:fld id="{37D525BB-DA17-4BA0-B3C8-3AC3ABC827E6}" type="datetimeFigureOut">
               <a:rPr lang="en-US" dirty="0"/>
-              <a:t>4/25/2026</a:t>
+              <a:t>4/27/2026</a:t>
             </a:fld>
             <a:endParaRPr lang="en-US" dirty="0"/>
           </a:p>
@@ -3886,7 +3886,7 @@
           <a:p>
             <a:fld id="{B16C4C9A-3960-41CF-A4E9-2A8FB932454B}" type="datetimeFigureOut">
               <a:rPr lang="en-US" dirty="0"/>
-              <a:t>4/25/2026</a:t>
+              <a:t>4/27/2026</a:t>
             </a:fld>
             <a:endParaRPr lang="en-US" dirty="0"/>
           </a:p>
@@ -4235,7 +4235,7 @@
           <a:p>
             <a:fld id="{3CBC1C18-307B-4F68-A007-B5B542270E8D}" type="datetimeFigureOut">
               <a:rPr lang="en-US" dirty="0"/>
-              <a:t>4/25/2026</a:t>
+              <a:t>4/27/2026</a:t>
             </a:fld>
             <a:endParaRPr lang="en-US" dirty="0"/>
           </a:p>
@@ -16816,7 +16816,7 @@
             </a:r>
             <a:r>
               <a:rPr lang="pt-BR" sz="1050" b="1" dirty="0"/>
-              <a:t> Classificação do nível de risco (baixo, moderado, alto e crítico</a:t>
+              <a:t> Classificação do nível de risco (baixo, moderado, alto e crítico);</a:t>
             </a:r>
             <a:br>
               <a:rPr lang="pt-BR" sz="1050" b="1" dirty="0"/>
